--- a/slides/pptx/week11.pptx
+++ b/slides/pptx/week11.pptx
@@ -691,7 +691,7 @@
           <a:p>
             <a:r>
               <a:rPr lang="en-US" dirty="0"/>
-              <a:t>Explain the 3 rounds before lab. Round 1 = instant feedback (it crashes or not). Round 3 (defend + Rust rewrite) is graded and the real lesson. Q6 of the quiz asks for the crashing input + the defense. ~3 min.</a:t>
+              <a:t>Explain the 3 rounds before lab. Round 1 = instant feedback (it crashes or not). Round 3 (defend + Rust rewrite) is graded and the real lesson. The weekly quiz no longer asks for the crashing input/defense/flag (dropped — quiz runs before the lab) — that's required in the worksheet instead. ~3 min.</a:t>
             </a:r>
             <a:endParaRPr lang="en-US" dirty="0"/>
           </a:p>
